--- a/docs/The_Beacon_Presentation.pptx
+++ b/docs/The_Beacon_Presentation.pptx
@@ -4695,7 +4695,7 @@
               </a:defRPr>
             </a:pPr>
             <a:r>
-              <a:t>Lighthouse Ministry Care System</a:t>
+              <a:t>LAMP Church Care System</a:t>
             </a:r>
           </a:p>
           <a:p>
